--- a/文档/semanticgit.pptx
+++ b/文档/semanticgit.pptx
@@ -5220,7 +5220,7 @@
         </p:blipFill>
         <p:spPr>
           <a:xfrm>
-            <a:off x="4792345" y="2388870"/>
+            <a:off x="4904740" y="2132965"/>
             <a:ext cx="182245" cy="182245"/>
           </a:xfrm>
           <a:prstGeom prst="rect">
